--- a/presentations/b08-ddi/B08_DDI_Narrated.pptx
+++ b/presentations/b08-ddi/B08_DDI_Narrated.pptx
@@ -187,7 +187,7 @@
     </p:spTree>
     <p:extLst>
       <p:ext uri="{BB962C8B-B14F-4D97-AF65-F5344CB8AC3E}">
-        <p14:creationId xmlns:p14="http://schemas.microsoft.com/office/powerpoint/2010/main" val="1786626779"/>
+        <p14:creationId xmlns:p14="http://schemas.microsoft.com/office/powerpoint/2010/main" val="1053596384"/>
       </p:ext>
     </p:extLst>
   </p:cSld>
@@ -2524,7 +2524,7 @@
             <a:hlinkClick r:id="" action="ppaction://media"/>
             <a:extLst>
               <a:ext uri="{FF2B5EF4-FFF2-40B4-BE49-F238E27FC236}">
-                <a16:creationId xmlns:a16="http://schemas.microsoft.com/office/drawing/2014/main" id="{2740D76B-D5D8-CA82-1B87-EB451654B786}"/>
+                <a16:creationId xmlns:a16="http://schemas.microsoft.com/office/drawing/2014/main" id="{FB9DDE1B-15B7-425A-2BB3-5408A7F76948}"/>
               </a:ext>
             </a:extLst>
           </p:cNvPr>
@@ -2540,7 +2540,7 @@
                     <p:ext uri="{3AFAAA56-56D3-431D-BCD4-E75A35582382}">
                       <p173:tracksInfo xmlns:p173="http://schemas.microsoft.com/office/powerpoint/2017/3/main" displayLoc="slide">
                         <p173:trackLst>
-                          <p173:track id="{DA6F6C3C-7CAC-4125-A319-498022993F41}" label="English (captions)" lang="en-US" r:embed="rId6"/>
+                          <p173:track id="{44F07A81-B870-4C38-A045-04C6A8B5D98B}" label="English (captions)" lang="en-US" r:embed="rId6"/>
                         </p173:trackLst>
                       </p173:tracksInfo>
                     </p:ext>
@@ -2558,7 +2558,7 @@
         </p:blipFill>
         <p:spPr>
           <a:xfrm>
-            <a:off x="127000" y="6350000"/>
+            <a:off x="12446000" y="127000"/>
             <a:ext cx="304800" cy="304800"/>
           </a:xfrm>
           <a:prstGeom prst="rect">
@@ -3946,7 +3946,7 @@
             <a:hlinkClick r:id="" action="ppaction://media"/>
             <a:extLst>
               <a:ext uri="{FF2B5EF4-FFF2-40B4-BE49-F238E27FC236}">
-                <a16:creationId xmlns:a16="http://schemas.microsoft.com/office/drawing/2014/main" id="{FB911C71-1447-1FE9-9AB9-5E56CBCA63FB}"/>
+                <a16:creationId xmlns:a16="http://schemas.microsoft.com/office/drawing/2014/main" id="{54059610-BFC1-F302-E265-72B919176A4A}"/>
               </a:ext>
             </a:extLst>
           </p:cNvPr>
@@ -3962,7 +3962,7 @@
                     <p:ext uri="{3AFAAA56-56D3-431D-BCD4-E75A35582382}">
                       <p173:tracksInfo xmlns:p173="http://schemas.microsoft.com/office/powerpoint/2017/3/main" displayLoc="slide">
                         <p173:trackLst>
-                          <p173:track id="{0275518D-7784-4402-9A18-2114D96EE5C0}" label="English (captions)" lang="en-US" r:embed="rId9"/>
+                          <p173:track id="{735775DB-46F3-4BCE-A1AF-0F39912D1C2A}" label="English (captions)" lang="en-US" r:embed="rId9"/>
                         </p173:trackLst>
                       </p173:tracksInfo>
                     </p:ext>
@@ -3980,7 +3980,7 @@
         </p:blipFill>
         <p:spPr>
           <a:xfrm>
-            <a:off x="127000" y="6350000"/>
+            <a:off x="12446000" y="127000"/>
             <a:ext cx="304800" cy="304800"/>
           </a:xfrm>
           <a:prstGeom prst="rect">
@@ -6211,7 +6211,7 @@
             <a:hlinkClick r:id="" action="ppaction://media"/>
             <a:extLst>
               <a:ext uri="{FF2B5EF4-FFF2-40B4-BE49-F238E27FC236}">
-                <a16:creationId xmlns:a16="http://schemas.microsoft.com/office/drawing/2014/main" id="{1403457B-1941-BFCC-E623-0BE080DEE8C8}"/>
+                <a16:creationId xmlns:a16="http://schemas.microsoft.com/office/drawing/2014/main" id="{9CE8C5EB-CB29-EAA0-6079-40DC2833ED07}"/>
               </a:ext>
             </a:extLst>
           </p:cNvPr>
@@ -6227,7 +6227,7 @@
                     <p:ext uri="{3AFAAA56-56D3-431D-BCD4-E75A35582382}">
                       <p173:tracksInfo xmlns:p173="http://schemas.microsoft.com/office/powerpoint/2017/3/main" displayLoc="slide">
                         <p173:trackLst>
-                          <p173:track id="{9D97C87F-A124-4E4B-B7F5-8E7FEC428B8E}" label="English (captions)" lang="en-US" r:embed="rId8"/>
+                          <p173:track id="{27B24B4B-0972-4781-9ACC-E9BE374A017B}" label="English (captions)" lang="en-US" r:embed="rId8"/>
                         </p173:trackLst>
                       </p173:tracksInfo>
                     </p:ext>
@@ -6245,7 +6245,7 @@
         </p:blipFill>
         <p:spPr>
           <a:xfrm>
-            <a:off x="127000" y="6350000"/>
+            <a:off x="12446000" y="127000"/>
             <a:ext cx="304800" cy="304800"/>
           </a:xfrm>
           <a:prstGeom prst="rect">
@@ -7301,7 +7301,7 @@
             <a:hlinkClick r:id="" action="ppaction://media"/>
             <a:extLst>
               <a:ext uri="{FF2B5EF4-FFF2-40B4-BE49-F238E27FC236}">
-                <a16:creationId xmlns:a16="http://schemas.microsoft.com/office/drawing/2014/main" id="{2A9FBC93-BA6C-869D-3EF4-AB6B59E7A2A1}"/>
+                <a16:creationId xmlns:a16="http://schemas.microsoft.com/office/drawing/2014/main" id="{2CB8B97F-9887-08BA-E9C4-295116B6328A}"/>
               </a:ext>
             </a:extLst>
           </p:cNvPr>
@@ -7317,7 +7317,7 @@
                     <p:ext uri="{3AFAAA56-56D3-431D-BCD4-E75A35582382}">
                       <p173:tracksInfo xmlns:p173="http://schemas.microsoft.com/office/powerpoint/2017/3/main" displayLoc="slide">
                         <p173:trackLst>
-                          <p173:track id="{794C7ED4-6E10-449B-84D1-045CAE5EACC0}" label="English (captions)" lang="en-US" r:embed="rId11"/>
+                          <p173:track id="{8EBCE071-CF77-441D-A136-D8373789B1C2}" label="English (captions)" lang="en-US" r:embed="rId11"/>
                         </p173:trackLst>
                       </p173:tracksInfo>
                     </p:ext>
@@ -7335,7 +7335,7 @@
         </p:blipFill>
         <p:spPr>
           <a:xfrm>
-            <a:off x="127000" y="6350000"/>
+            <a:off x="12446000" y="127000"/>
             <a:ext cx="304800" cy="304800"/>
           </a:xfrm>
           <a:prstGeom prst="rect">
@@ -8815,7 +8815,7 @@
             <a:hlinkClick r:id="" action="ppaction://media"/>
             <a:extLst>
               <a:ext uri="{FF2B5EF4-FFF2-40B4-BE49-F238E27FC236}">
-                <a16:creationId xmlns:a16="http://schemas.microsoft.com/office/drawing/2014/main" id="{04D5680F-84FC-BE63-FA8A-DF2CF96926EE}"/>
+                <a16:creationId xmlns:a16="http://schemas.microsoft.com/office/drawing/2014/main" id="{06F3C95D-C62C-7E99-6DBE-977B622D24F2}"/>
               </a:ext>
             </a:extLst>
           </p:cNvPr>
@@ -8831,7 +8831,7 @@
                     <p:ext uri="{3AFAAA56-56D3-431D-BCD4-E75A35582382}">
                       <p173:tracksInfo xmlns:p173="http://schemas.microsoft.com/office/powerpoint/2017/3/main" displayLoc="slide">
                         <p173:trackLst>
-                          <p173:track id="{0CE7CBD6-FEA4-4528-9726-FB404D629DBF}" label="English (captions)" lang="en-US" r:embed="rId8"/>
+                          <p173:track id="{41E126CF-5C0B-4DC6-BA4A-640F9BF6B419}" label="English (captions)" lang="en-US" r:embed="rId8"/>
                         </p173:trackLst>
                       </p173:tracksInfo>
                     </p:ext>
@@ -8849,7 +8849,7 @@
         </p:blipFill>
         <p:spPr>
           <a:xfrm>
-            <a:off x="127000" y="6350000"/>
+            <a:off x="12446000" y="127000"/>
             <a:ext cx="304800" cy="304800"/>
           </a:xfrm>
           <a:prstGeom prst="rect">
@@ -9918,7 +9918,7 @@
             <a:hlinkClick r:id="" action="ppaction://media"/>
             <a:extLst>
               <a:ext uri="{FF2B5EF4-FFF2-40B4-BE49-F238E27FC236}">
-                <a16:creationId xmlns:a16="http://schemas.microsoft.com/office/drawing/2014/main" id="{32A62283-B44C-AAED-0D5A-D20A909FF63B}"/>
+                <a16:creationId xmlns:a16="http://schemas.microsoft.com/office/drawing/2014/main" id="{9D8D4E32-70A2-7181-9624-216CD7CD52FF}"/>
               </a:ext>
             </a:extLst>
           </p:cNvPr>
@@ -9934,7 +9934,7 @@
                     <p:ext uri="{3AFAAA56-56D3-431D-BCD4-E75A35582382}">
                       <p173:tracksInfo xmlns:p173="http://schemas.microsoft.com/office/powerpoint/2017/3/main" displayLoc="slide">
                         <p173:trackLst>
-                          <p173:track id="{C407E5DD-DD06-4396-A512-2760C669BFFC}" label="English (captions)" lang="en-US" r:embed="rId11"/>
+                          <p173:track id="{308F1A42-81B1-41D1-8AC8-A38453EAEB6F}" label="English (captions)" lang="en-US" r:embed="rId11"/>
                         </p173:trackLst>
                       </p173:tracksInfo>
                     </p:ext>
@@ -9952,7 +9952,7 @@
         </p:blipFill>
         <p:spPr>
           <a:xfrm>
-            <a:off x="127000" y="6350000"/>
+            <a:off x="12446000" y="127000"/>
             <a:ext cx="304800" cy="304800"/>
           </a:xfrm>
           <a:prstGeom prst="rect">
@@ -11211,7 +11211,7 @@
             <a:hlinkClick r:id="" action="ppaction://media"/>
             <a:extLst>
               <a:ext uri="{FF2B5EF4-FFF2-40B4-BE49-F238E27FC236}">
-                <a16:creationId xmlns:a16="http://schemas.microsoft.com/office/drawing/2014/main" id="{6F3821A1-1493-3C2D-66D6-8ABCCDD64F59}"/>
+                <a16:creationId xmlns:a16="http://schemas.microsoft.com/office/drawing/2014/main" id="{6ABFEEA2-6094-415B-9721-E36623B83CE0}"/>
               </a:ext>
             </a:extLst>
           </p:cNvPr>
@@ -11227,7 +11227,7 @@
                     <p:ext uri="{3AFAAA56-56D3-431D-BCD4-E75A35582382}">
                       <p173:tracksInfo xmlns:p173="http://schemas.microsoft.com/office/powerpoint/2017/3/main" displayLoc="slide">
                         <p173:trackLst>
-                          <p173:track id="{5EB75E50-3708-4B60-9E9C-FB1DDBC0CF6C}" label="English (captions)" lang="en-US" r:embed="rId8"/>
+                          <p173:track id="{6CBF7E15-2511-4BE6-ADD6-EA84B228852F}" label="English (captions)" lang="en-US" r:embed="rId8"/>
                         </p173:trackLst>
                       </p173:tracksInfo>
                     </p:ext>
@@ -11245,7 +11245,7 @@
         </p:blipFill>
         <p:spPr>
           <a:xfrm>
-            <a:off x="127000" y="6350000"/>
+            <a:off x="12446000" y="127000"/>
             <a:ext cx="304800" cy="304800"/>
           </a:xfrm>
           <a:prstGeom prst="rect">
@@ -12226,7 +12226,7 @@
             <a:hlinkClick r:id="" action="ppaction://media"/>
             <a:extLst>
               <a:ext uri="{FF2B5EF4-FFF2-40B4-BE49-F238E27FC236}">
-                <a16:creationId xmlns:a16="http://schemas.microsoft.com/office/drawing/2014/main" id="{8B4194C0-ED8F-DA3D-61D6-04B3A7A38CCC}"/>
+                <a16:creationId xmlns:a16="http://schemas.microsoft.com/office/drawing/2014/main" id="{5D07B016-1C87-C68D-A347-48995689D4F7}"/>
               </a:ext>
             </a:extLst>
           </p:cNvPr>
@@ -12242,7 +12242,7 @@
                     <p:ext uri="{3AFAAA56-56D3-431D-BCD4-E75A35582382}">
                       <p173:tracksInfo xmlns:p173="http://schemas.microsoft.com/office/powerpoint/2017/3/main" displayLoc="slide">
                         <p173:trackLst>
-                          <p173:track id="{C1F7A014-0712-4E16-903F-18D1A1063465}" label="English (captions)" lang="en-US" r:embed="rId10"/>
+                          <p173:track id="{9859C4E7-7BAC-4059-A2C6-521AD04ACF03}" label="English (captions)" lang="en-US" r:embed="rId10"/>
                         </p173:trackLst>
                       </p173:tracksInfo>
                     </p:ext>
@@ -12260,7 +12260,7 @@
         </p:blipFill>
         <p:spPr>
           <a:xfrm>
-            <a:off x="127000" y="6350000"/>
+            <a:off x="12446000" y="127000"/>
             <a:ext cx="304800" cy="304800"/>
           </a:xfrm>
           <a:prstGeom prst="rect">
@@ -13847,7 +13847,7 @@
             <a:hlinkClick r:id="" action="ppaction://media"/>
             <a:extLst>
               <a:ext uri="{FF2B5EF4-FFF2-40B4-BE49-F238E27FC236}">
-                <a16:creationId xmlns:a16="http://schemas.microsoft.com/office/drawing/2014/main" id="{DDEC60CE-8022-7D86-A8C4-48F5FC174A48}"/>
+                <a16:creationId xmlns:a16="http://schemas.microsoft.com/office/drawing/2014/main" id="{565DAB59-B9CB-B1C6-53A0-B9F141BDC137}"/>
               </a:ext>
             </a:extLst>
           </p:cNvPr>
@@ -13863,7 +13863,7 @@
                     <p:ext uri="{3AFAAA56-56D3-431D-BCD4-E75A35582382}">
                       <p173:tracksInfo xmlns:p173="http://schemas.microsoft.com/office/powerpoint/2017/3/main" displayLoc="slide">
                         <p173:trackLst>
-                          <p173:track id="{8E18F2B5-84CB-43D1-8F79-FD8496F11328}" label="English (captions)" lang="en-US" r:embed="rId8"/>
+                          <p173:track id="{6FC4FF75-B245-4655-9B13-6A468739D67B}" label="English (captions)" lang="en-US" r:embed="rId8"/>
                         </p173:trackLst>
                       </p173:tracksInfo>
                     </p:ext>
@@ -13881,7 +13881,7 @@
         </p:blipFill>
         <p:spPr>
           <a:xfrm>
-            <a:off x="127000" y="6350000"/>
+            <a:off x="12446000" y="127000"/>
             <a:ext cx="304800" cy="304800"/>
           </a:xfrm>
           <a:prstGeom prst="rect">
@@ -15038,7 +15038,7 @@
             <a:hlinkClick r:id="" action="ppaction://media"/>
             <a:extLst>
               <a:ext uri="{FF2B5EF4-FFF2-40B4-BE49-F238E27FC236}">
-                <a16:creationId xmlns:a16="http://schemas.microsoft.com/office/drawing/2014/main" id="{1D726B56-4B65-2567-0517-8F6601C769ED}"/>
+                <a16:creationId xmlns:a16="http://schemas.microsoft.com/office/drawing/2014/main" id="{284594C2-9576-8194-ED08-E0D2205E3EE5}"/>
               </a:ext>
             </a:extLst>
           </p:cNvPr>
@@ -15054,7 +15054,7 @@
                     <p:ext uri="{3AFAAA56-56D3-431D-BCD4-E75A35582382}">
                       <p173:tracksInfo xmlns:p173="http://schemas.microsoft.com/office/powerpoint/2017/3/main" displayLoc="slide">
                         <p173:trackLst>
-                          <p173:track id="{77D11C19-F40C-4378-85D6-6B3E830EAB33}" label="English (captions)" lang="en-US" r:embed="rId8"/>
+                          <p173:track id="{B55AA03F-C106-464C-ADAC-A66BA3BA33AF}" label="English (captions)" lang="en-US" r:embed="rId8"/>
                         </p173:trackLst>
                       </p173:tracksInfo>
                     </p:ext>
@@ -15072,7 +15072,7 @@
         </p:blipFill>
         <p:spPr>
           <a:xfrm>
-            <a:off x="127000" y="6350000"/>
+            <a:off x="12446000" y="127000"/>
             <a:ext cx="304800" cy="304800"/>
           </a:xfrm>
           <a:prstGeom prst="rect">
@@ -16227,7 +16227,7 @@
             <a:hlinkClick r:id="" action="ppaction://media"/>
             <a:extLst>
               <a:ext uri="{FF2B5EF4-FFF2-40B4-BE49-F238E27FC236}">
-                <a16:creationId xmlns:a16="http://schemas.microsoft.com/office/drawing/2014/main" id="{574AC07D-791F-336E-E36B-293550CBC7D8}"/>
+                <a16:creationId xmlns:a16="http://schemas.microsoft.com/office/drawing/2014/main" id="{4A4E9A0C-E00D-AA42-854E-530B595A9FAA}"/>
               </a:ext>
             </a:extLst>
           </p:cNvPr>
@@ -16243,7 +16243,7 @@
                     <p:ext uri="{3AFAAA56-56D3-431D-BCD4-E75A35582382}">
                       <p173:tracksInfo xmlns:p173="http://schemas.microsoft.com/office/powerpoint/2017/3/main" displayLoc="slide">
                         <p173:trackLst>
-                          <p173:track id="{65FDC828-2209-4214-A02E-4017B2F319FE}" label="English (captions)" lang="en-US" r:embed="rId10"/>
+                          <p173:track id="{320C3C73-8059-4DF7-92EF-BF0DA1CC491A}" label="English (captions)" lang="en-US" r:embed="rId10"/>
                         </p173:trackLst>
                       </p173:tracksInfo>
                     </p:ext>
@@ -16261,7 +16261,7 @@
         </p:blipFill>
         <p:spPr>
           <a:xfrm>
-            <a:off x="127000" y="6350000"/>
+            <a:off x="12446000" y="127000"/>
             <a:ext cx="304800" cy="304800"/>
           </a:xfrm>
           <a:prstGeom prst="rect">
@@ -17334,7 +17334,7 @@
             <a:hlinkClick r:id="" action="ppaction://media"/>
             <a:extLst>
               <a:ext uri="{FF2B5EF4-FFF2-40B4-BE49-F238E27FC236}">
-                <a16:creationId xmlns:a16="http://schemas.microsoft.com/office/drawing/2014/main" id="{D9EC77D6-374E-2F95-70A4-D14AB83A3269}"/>
+                <a16:creationId xmlns:a16="http://schemas.microsoft.com/office/drawing/2014/main" id="{D2EA9AD6-8A14-EE9F-F6A4-31E434FDD98C}"/>
               </a:ext>
             </a:extLst>
           </p:cNvPr>
@@ -17350,7 +17350,7 @@
                     <p:ext uri="{3AFAAA56-56D3-431D-BCD4-E75A35582382}">
                       <p173:tracksInfo xmlns:p173="http://schemas.microsoft.com/office/powerpoint/2017/3/main" displayLoc="slide">
                         <p173:trackLst>
-                          <p173:track id="{1324909A-A8E8-4816-B16B-0F98C70E938A}" label="English (captions)" lang="en-US" r:embed="rId8"/>
+                          <p173:track id="{EC563A16-EB35-4798-BD85-965ED1062FCC}" label="English (captions)" lang="en-US" r:embed="rId8"/>
                         </p173:trackLst>
                       </p173:tracksInfo>
                     </p:ext>
@@ -17368,7 +17368,7 @@
         </p:blipFill>
         <p:spPr>
           <a:xfrm>
-            <a:off x="127000" y="6350000"/>
+            <a:off x="12446000" y="127000"/>
             <a:ext cx="304800" cy="304800"/>
           </a:xfrm>
           <a:prstGeom prst="rect">
@@ -19370,7 +19370,7 @@
             <a:hlinkClick r:id="" action="ppaction://media"/>
             <a:extLst>
               <a:ext uri="{FF2B5EF4-FFF2-40B4-BE49-F238E27FC236}">
-                <a16:creationId xmlns:a16="http://schemas.microsoft.com/office/drawing/2014/main" id="{36DADDA9-4190-9E6F-1CA5-2DC45900DB89}"/>
+                <a16:creationId xmlns:a16="http://schemas.microsoft.com/office/drawing/2014/main" id="{EB7FBC58-262C-16D6-149B-334104AB4502}"/>
               </a:ext>
             </a:extLst>
           </p:cNvPr>
@@ -19386,7 +19386,7 @@
                     <p:ext uri="{3AFAAA56-56D3-431D-BCD4-E75A35582382}">
                       <p173:tracksInfo xmlns:p173="http://schemas.microsoft.com/office/powerpoint/2017/3/main" displayLoc="slide">
                         <p173:trackLst>
-                          <p173:track id="{BE2E2309-1C0C-4003-8A60-79E709E56D1C}" label="English (captions)" lang="en-US" r:embed="rId8"/>
+                          <p173:track id="{ECD080DE-7711-41EC-8C42-12CBAE115796}" label="English (captions)" lang="en-US" r:embed="rId8"/>
                         </p173:trackLst>
                       </p173:tracksInfo>
                     </p:ext>
@@ -19404,7 +19404,7 @@
         </p:blipFill>
         <p:spPr>
           <a:xfrm>
-            <a:off x="127000" y="6350000"/>
+            <a:off x="12446000" y="127000"/>
             <a:ext cx="304800" cy="304800"/>
           </a:xfrm>
           <a:prstGeom prst="rect">
@@ -20961,7 +20961,7 @@
             <a:hlinkClick r:id="" action="ppaction://media"/>
             <a:extLst>
               <a:ext uri="{FF2B5EF4-FFF2-40B4-BE49-F238E27FC236}">
-                <a16:creationId xmlns:a16="http://schemas.microsoft.com/office/drawing/2014/main" id="{72A47C0D-7F84-4311-BADF-AE10F58D8DB3}"/>
+                <a16:creationId xmlns:a16="http://schemas.microsoft.com/office/drawing/2014/main" id="{8A248348-697A-D9C9-B3CB-591860C88F35}"/>
               </a:ext>
             </a:extLst>
           </p:cNvPr>
@@ -20977,7 +20977,7 @@
                     <p:ext uri="{3AFAAA56-56D3-431D-BCD4-E75A35582382}">
                       <p173:tracksInfo xmlns:p173="http://schemas.microsoft.com/office/powerpoint/2017/3/main" displayLoc="slide">
                         <p173:trackLst>
-                          <p173:track id="{421A778D-BCF8-4F9A-BA45-972CE2F64890}" label="English (captions)" lang="en-US" r:embed="rId7"/>
+                          <p173:track id="{BF4117EA-7086-40F5-B8D1-B7B529FC5E3D}" label="English (captions)" lang="en-US" r:embed="rId7"/>
                         </p173:trackLst>
                       </p173:tracksInfo>
                     </p:ext>
@@ -20995,7 +20995,7 @@
         </p:blipFill>
         <p:spPr>
           <a:xfrm>
-            <a:off x="127000" y="6350000"/>
+            <a:off x="12446000" y="127000"/>
             <a:ext cx="304800" cy="304800"/>
           </a:xfrm>
           <a:prstGeom prst="rect">
